--- a/website/public/generated/The-BIG-PH01/06_samco_pco_08_pro_eqp_08_equipment_plant.pptx
+++ b/website/public/generated/The-BIG-PH01/06_samco_pco_08_pro_eqp_08_equipment_plant.pptx
@@ -3162,7 +3162,7 @@
               </a:defRPr>
             </a:pPr>
             <a:r>
-              <a:t>ROYA-BIG PROJECT PHASE01 (B1-4) | 1 data-driven control section | 2026-08-14T03:05:31+00:00</a:t>
+              <a:t>ROYA-BIG PROJECT PHASE01 (B1-4) | 1 data-driven control section | 2026-08-15T05:31:00+00:00</a:t>
             </a:r>
           </a:p>
         </p:txBody>
